--- a/Suimon_Navi_Plan.pptx
+++ b/Suimon_Navi_Plan.pptx
@@ -2009,7 +2009,7 @@
       </p:sp>
       <p:pic>
         <p:nvPicPr>
-          <p:cNvPr id="5" name="Image 0" descr="preencoded.png">    </p:cNvPr>
+          <p:cNvPr id="5" name="Image 0" descr="preencoded.png"/>
           <p:cNvPicPr>
             <a:picLocks noChangeAspect="1"/>
           </p:cNvPicPr>
@@ -2064,7 +2064,7 @@
                 <a:ea typeface="Cambria" pitchFamily="34" charset="-122"/>
                 <a:cs typeface="Cambria" pitchFamily="34" charset="-120"/>
               </a:rPr>
-              <a:t>水門ナビ</a:t>
+              <a:t>スイスイナビ</a:t>
             </a:r>
             <a:endParaRPr lang="en-US" sz="4800" dirty="0"/>
           </a:p>
@@ -2103,7 +2103,7 @@
                 <a:ea typeface="Calibri" pitchFamily="34" charset="-122"/>
                 <a:cs typeface="Calibri" pitchFamily="34" charset="-120"/>
               </a:rPr>
-              <a:t>Suimon Navi — 水田水門タイミング意思決定支援</a:t>
+              <a:t>水門ナビ / Suimon Navi — 水田水門タイミング意思決定支援</a:t>
             </a:r>
             <a:endParaRPr lang="en-US" sz="2000" dirty="0"/>
           </a:p>
@@ -4092,7 +4092,7 @@
       </p:sp>
       <p:pic>
         <p:nvPicPr>
-          <p:cNvPr id="6" name="Image 0" descr="preencoded.png">    </p:cNvPr>
+          <p:cNvPr id="6" name="Image 0" descr="preencoded.png"/>
           <p:cNvPicPr>
             <a:picLocks noChangeAspect="1"/>
           </p:cNvPicPr>
@@ -4230,7 +4230,7 @@
       </p:sp>
       <p:pic>
         <p:nvPicPr>
-          <p:cNvPr id="11" name="Image 1" descr="preencoded.png">    </p:cNvPr>
+          <p:cNvPr id="11" name="Image 1" descr="preencoded.png"/>
           <p:cNvPicPr>
             <a:picLocks noChangeAspect="1"/>
           </p:cNvPicPr>
@@ -4368,7 +4368,7 @@
       </p:sp>
       <p:pic>
         <p:nvPicPr>
-          <p:cNvPr id="16" name="Image 2" descr="preencoded.png">    </p:cNvPr>
+          <p:cNvPr id="16" name="Image 2" descr="preencoded.png"/>
           <p:cNvPicPr>
             <a:picLocks noChangeAspect="1"/>
           </p:cNvPicPr>
@@ -4506,7 +4506,7 @@
       </p:sp>
       <p:pic>
         <p:nvPicPr>
-          <p:cNvPr id="21" name="Image 3" descr="preencoded.png">    </p:cNvPr>
+          <p:cNvPr id="21" name="Image 3" descr="preencoded.png"/>
           <p:cNvPicPr>
             <a:picLocks noChangeAspect="1"/>
           </p:cNvPicPr>
@@ -4765,7 +4765,7 @@
       </p:sp>
       <p:pic>
         <p:nvPicPr>
-          <p:cNvPr id="5" name="Image 0" descr="preencoded.png">    </p:cNvPr>
+          <p:cNvPr id="5" name="Image 0" descr="preencoded.png"/>
           <p:cNvPicPr>
             <a:picLocks noChangeAspect="1"/>
           </p:cNvPicPr>
@@ -4940,7 +4940,7 @@
       </p:sp>
       <p:pic>
         <p:nvPicPr>
-          <p:cNvPr id="11" name="Image 1" descr="preencoded.png">    </p:cNvPr>
+          <p:cNvPr id="11" name="Image 1" descr="preencoded.png"/>
           <p:cNvPicPr>
             <a:picLocks noChangeAspect="1"/>
           </p:cNvPicPr>
@@ -5115,7 +5115,7 @@
       </p:sp>
       <p:pic>
         <p:nvPicPr>
-          <p:cNvPr id="17" name="Image 2" descr="preencoded.png">    </p:cNvPr>
+          <p:cNvPr id="17" name="Image 2" descr="preencoded.png"/>
           <p:cNvPicPr>
             <a:picLocks noChangeAspect="1"/>
           </p:cNvPicPr>
@@ -5290,7 +5290,7 @@
       </p:sp>
       <p:pic>
         <p:nvPicPr>
-          <p:cNvPr id="23" name="Image 3" descr="preencoded.png">    </p:cNvPr>
+          <p:cNvPr id="23" name="Image 3" descr="preencoded.png"/>
           <p:cNvPicPr>
             <a:picLocks noChangeAspect="1"/>
           </p:cNvPicPr>
@@ -6862,7 +6862,7 @@
       </p:sp>
       <p:pic>
         <p:nvPicPr>
-          <p:cNvPr id="6" name="Image 0" descr="preencoded.png">    </p:cNvPr>
+          <p:cNvPr id="6" name="Image 0" descr="preencoded.png"/>
           <p:cNvPicPr>
             <a:picLocks noChangeAspect="1"/>
           </p:cNvPicPr>
@@ -7350,7 +7350,7 @@
       </p:sp>
       <p:pic>
         <p:nvPicPr>
-          <p:cNvPr id="6" name="Image 0" descr="preencoded.png">    </p:cNvPr>
+          <p:cNvPr id="6" name="Image 0" descr="preencoded.png"/>
           <p:cNvPicPr>
             <a:picLocks noChangeAspect="1"/>
           </p:cNvPicPr>
@@ -7534,7 +7534,7 @@
       </p:sp>
       <p:pic>
         <p:nvPicPr>
-          <p:cNvPr id="11" name="Image 1" descr="preencoded.png">    </p:cNvPr>
+          <p:cNvPr id="11" name="Image 1" descr="preencoded.png"/>
           <p:cNvPicPr>
             <a:picLocks noChangeAspect="1"/>
           </p:cNvPicPr>
@@ -7869,7 +7869,7 @@
                   <a:srgbClr val="FFFFFF"/>
                 </a:solidFill>
               </a:rPr>
-              <a:t>水門ナビ = 水門操作タイミングの「意思決定支援」Webアプリ</a:t>
+              <a:t>スイスイナビ（水門ナビ）= 水門操作タイミングの「意思決定支援」Webアプリ</a:t>
             </a:r>
             <a:endParaRPr lang="en-US" sz="1900" dirty="0"/>
           </a:p>
@@ -7955,7 +7955,7 @@
       </p:sp>
       <p:pic>
         <p:nvPicPr>
-          <p:cNvPr id="9" name="Image 0" descr="preencoded.png">    </p:cNvPr>
+          <p:cNvPr id="9" name="Image 0" descr="preencoded.png"/>
           <p:cNvPicPr>
             <a:picLocks noChangeAspect="1"/>
           </p:cNvPicPr>
@@ -8093,7 +8093,7 @@
       </p:sp>
       <p:pic>
         <p:nvPicPr>
-          <p:cNvPr id="14" name="Image 1" descr="preencoded.png">    </p:cNvPr>
+          <p:cNvPr id="14" name="Image 1" descr="preencoded.png"/>
           <p:cNvPicPr>
             <a:picLocks noChangeAspect="1"/>
           </p:cNvPicPr>
@@ -8231,7 +8231,7 @@
       </p:sp>
       <p:pic>
         <p:nvPicPr>
-          <p:cNvPr id="19" name="Image 2" descr="preencoded.png">    </p:cNvPr>
+          <p:cNvPr id="19" name="Image 2" descr="preencoded.png"/>
           <p:cNvPicPr>
             <a:picLocks noChangeAspect="1"/>
           </p:cNvPicPr>
@@ -8483,7 +8483,7 @@
       </p:sp>
       <p:pic>
         <p:nvPicPr>
-          <p:cNvPr id="6" name="Image 0" descr="preencoded.png">    </p:cNvPr>
+          <p:cNvPr id="6" name="Image 0" descr="preencoded.png"/>
           <p:cNvPicPr>
             <a:picLocks noChangeAspect="1"/>
           </p:cNvPicPr>
@@ -8665,7 +8665,7 @@
       </p:sp>
       <p:pic>
         <p:nvPicPr>
-          <p:cNvPr id="12" name="Image 1" descr="preencoded.png">    </p:cNvPr>
+          <p:cNvPr id="12" name="Image 1" descr="preencoded.png"/>
           <p:cNvPicPr>
             <a:picLocks noChangeAspect="1"/>
           </p:cNvPicPr>
@@ -8847,7 +8847,7 @@
       </p:sp>
       <p:pic>
         <p:nvPicPr>
-          <p:cNvPr id="18" name="Image 2" descr="preencoded.png">    </p:cNvPr>
+          <p:cNvPr id="18" name="Image 2" descr="preencoded.png"/>
           <p:cNvPicPr>
             <a:picLocks noChangeAspect="1"/>
           </p:cNvPicPr>
@@ -9029,7 +9029,7 @@
       </p:sp>
       <p:pic>
         <p:nvPicPr>
-          <p:cNvPr id="24" name="Image 3" descr="preencoded.png">    </p:cNvPr>
+          <p:cNvPr id="24" name="Image 3" descr="preencoded.png"/>
           <p:cNvPicPr>
             <a:picLocks noChangeAspect="1"/>
           </p:cNvPicPr>
@@ -9211,7 +9211,7 @@
       </p:sp>
       <p:pic>
         <p:nvPicPr>
-          <p:cNvPr id="30" name="Image 4" descr="preencoded.png">    </p:cNvPr>
+          <p:cNvPr id="30" name="Image 4" descr="preencoded.png"/>
           <p:cNvPicPr>
             <a:picLocks noChangeAspect="1"/>
           </p:cNvPicPr>
@@ -9525,7 +9525,7 @@
                   <a:srgbClr val="9FD8CB"/>
                 </a:solidFill>
               </a:rPr>
-              <a:t> klayertan.github.io/michibiki-suimon-navi/ </a:t>
+              <a:t xml:space="preserve"> klayertan.github.io/michibiki-suimon-navi/ </a:t>
             </a:r>
             <a:pPr indent="0" marL="0">
               <a:buNone/>
@@ -10064,7 +10064,7 @@
       </p:sp>
       <p:pic>
         <p:nvPicPr>
-          <p:cNvPr id="6" name="Image 0" descr="preencoded.png">    </p:cNvPr>
+          <p:cNvPr id="6" name="Image 0" descr="preencoded.png"/>
           <p:cNvPicPr>
             <a:picLocks noChangeAspect="1"/>
           </p:cNvPicPr>
@@ -10786,7 +10786,7 @@
                   <a:srgbClr val="1E293B"/>
                 </a:solidFill>
               </a:rPr>
-              <a:t>水位・灌漑の異常（Suimon Naviの中核）</a:t>
+              <a:t>水位・灌漑の異常（スイスイナビの中核）</a:t>
             </a:r>
             <a:endParaRPr lang="en-US" sz="1250" dirty="0"/>
           </a:p>
